--- a/weekly_presentations/week04_control.pptx
+++ b/weekly_presentations/week04_control.pptx
@@ -11,6 +11,9 @@
     <p:sldId id="259" r:id="rId10"/>
     <p:sldId id="260" r:id="rId11"/>
     <p:sldId id="261" r:id="rId12"/>
+    <p:sldId id="262" r:id="rId13"/>
+    <p:sldId id="263" r:id="rId14"/>
+    <p:sldId id="264" r:id="rId15"/>
   </p:sldIdLst>
   <p:sldSz cx="12191695" cy="6858000" type="screen4x3"/>
   <p:notesSz cx="6858000" cy="9144000"/>
@@ -3183,24 +3186,24 @@
           <a:lstStyle/>
           <a:p>
             <a:r>
-              <a:rPr sz="3200" b="1" i="0">
+              <a:rPr sz="3000" b="1" i="0">
                 <a:solidFill>
                   <a:srgbClr val="990000"/>
                 </a:solidFill>
                 <a:latin typeface="Arial"/>
               </a:rPr>
-              <a:t>Week 4 — Stochastic Optimal Control in Continuous Time</a:t>
-            </a:r>
-          </a:p>
-          <a:p>
-            <a:r>
-              <a:rPr sz="1900" b="0" i="1">
+              <a:t>Week 4 — Stochastic Optimal Control</a:t>
+            </a:r>
+          </a:p>
+          <a:p>
+            <a:r>
+              <a:rPr sz="1800" b="0" i="1">
                 <a:solidFill>
                   <a:srgbClr val="6D6D6D"/>
                 </a:solidFill>
                 <a:latin typeface="Arial"/>
               </a:rPr>
-              <a:t>The general theory behind the worked example</a:t>
+              <a:t>The general theory behind the Avellaneda-Stoikov worked example</a:t>
             </a:r>
           </a:p>
         </p:txBody>
@@ -3236,49 +3239,6 @@
               </a:rPr>
               <a:t>Optimal Market Making for Cryptocurrency Options  ·  NC State University</a:t>
             </a:r>
-          </a:p>
-        </p:txBody>
-      </p:sp>
-      <p:sp>
-        <p:nvSpPr>
-          <p:cNvPr id="6" name="Rectangle 5"/>
-          <p:cNvSpPr/>
-          <p:nvPr/>
-        </p:nvSpPr>
-        <p:spPr>
-          <a:xfrm>
-            <a:off x="548640" y="5394960"/>
-            <a:ext cx="3657600" cy="38100"/>
-          </a:xfrm>
-          <a:prstGeom prst="rect">
-            <a:avLst/>
-          </a:prstGeom>
-          <a:solidFill>
-            <a:srgbClr val="CC0000"/>
-          </a:solidFill>
-          <a:ln>
-            <a:noFill/>
-          </a:ln>
-        </p:spPr>
-        <p:style>
-          <a:lnRef idx="1">
-            <a:schemeClr val="accent1"/>
-          </a:lnRef>
-          <a:fillRef idx="3">
-            <a:schemeClr val="accent1"/>
-          </a:fillRef>
-          <a:effectRef idx="2">
-            <a:schemeClr val="accent1"/>
-          </a:effectRef>
-          <a:fontRef idx="minor">
-            <a:schemeClr val="lt1"/>
-          </a:fontRef>
-        </p:style>
-        <p:txBody>
-          <a:bodyPr rtlCol="0" anchor="ctr"/>
-          <a:lstStyle/>
-          <a:p>
-            <a:pPr algn="ctr"/>
           </a:p>
         </p:txBody>
       </p:sp>
@@ -3341,13 +3301,13 @@
           <a:noFill/>
         </p:spPr>
         <p:txBody>
-          <a:bodyPr wrap="none">
+          <a:bodyPr wrap="square">
             <a:spAutoFit/>
           </a:bodyPr>
           <a:lstStyle/>
           <a:p>
             <a:r>
-              <a:rPr sz="2600" b="1" i="0">
+              <a:rPr sz="2400" b="1" i="0">
                 <a:solidFill>
                   <a:srgbClr val="990000"/>
                 </a:solidFill>
@@ -3366,8 +3326,8 @@
         </p:nvSpPr>
         <p:spPr>
           <a:xfrm>
-            <a:off x="457200" y="1234440"/>
-            <a:ext cx="11247120" cy="31750"/>
+            <a:off x="457200" y="1371600"/>
+            <a:ext cx="11247120" cy="27940"/>
           </a:xfrm>
           <a:prstGeom prst="rect">
             <a:avLst/>
@@ -3409,7 +3369,7 @@
         </p:nvSpPr>
         <p:spPr>
           <a:xfrm>
-            <a:off x="640080" y="1554480"/>
+            <a:off x="640080" y="1600200"/>
             <a:ext cx="10972800" cy="4937760"/>
           </a:xfrm>
           <a:prstGeom prst="rect">
@@ -3425,11 +3385,11 @@
           <a:p>
             <a:pPr>
               <a:spcAft>
-                <a:spcPts val="1000"/>
+                <a:spcPts val="800"/>
               </a:spcAft>
             </a:pPr>
             <a:r>
-              <a:rPr sz="1900" b="0" i="0">
+              <a:rPr sz="1700" b="0" i="0">
                 <a:solidFill>
                   <a:srgbClr val="1A1A1A"/>
                 </a:solidFill>
@@ -3441,11 +3401,11 @@
           <a:p>
             <a:pPr>
               <a:spcAft>
-                <a:spcPts val="1000"/>
+                <a:spcPts val="800"/>
               </a:spcAft>
             </a:pPr>
             <a:r>
-              <a:rPr sz="1900" b="0" i="0">
+              <a:rPr sz="1700" b="0" i="0">
                 <a:solidFill>
                   <a:srgbClr val="1A1A1A"/>
                 </a:solidFill>
@@ -3457,17 +3417,17 @@
           <a:p>
             <a:pPr>
               <a:spcAft>
-                <a:spcPts val="1000"/>
+                <a:spcPts val="800"/>
               </a:spcAft>
             </a:pPr>
             <a:r>
-              <a:rPr sz="1900" b="0" i="0">
+              <a:rPr sz="1700" b="0" i="0">
                 <a:solidFill>
                   <a:srgbClr val="1A1A1A"/>
                 </a:solidFill>
                 <a:latin typeface="Arial"/>
               </a:rPr>
-              <a:t>•  See why CARA and CRRA utilities give tractable problems</a:t>
+              <a:t>•  See why CARA / CRRA utilities give tractable problems</a:t>
             </a:r>
           </a:p>
         </p:txBody>
@@ -3531,13 +3491,13 @@
           <a:noFill/>
         </p:spPr>
         <p:txBody>
-          <a:bodyPr wrap="none">
+          <a:bodyPr wrap="square">
             <a:spAutoFit/>
           </a:bodyPr>
           <a:lstStyle/>
           <a:p>
             <a:r>
-              <a:rPr sz="2600" b="1" i="0">
+              <a:rPr sz="2400" b="1" i="0">
                 <a:solidFill>
                   <a:srgbClr val="990000"/>
                 </a:solidFill>
@@ -3556,8 +3516,8 @@
         </p:nvSpPr>
         <p:spPr>
           <a:xfrm>
-            <a:off x="457200" y="1234440"/>
-            <a:ext cx="11247120" cy="31750"/>
+            <a:off x="457200" y="1371600"/>
+            <a:ext cx="11247120" cy="27940"/>
           </a:xfrm>
           <a:prstGeom prst="rect">
             <a:avLst/>
@@ -3599,7 +3559,7 @@
         </p:nvSpPr>
         <p:spPr>
           <a:xfrm>
-            <a:off x="640080" y="1554480"/>
+            <a:off x="640080" y="1600200"/>
             <a:ext cx="10972800" cy="4937760"/>
           </a:xfrm>
           <a:prstGeom prst="rect">
@@ -3615,11 +3575,11 @@
           <a:p>
             <a:pPr>
               <a:spcAft>
-                <a:spcPts val="1000"/>
+                <a:spcPts val="800"/>
               </a:spcAft>
             </a:pPr>
             <a:r>
-              <a:rPr sz="1900" b="0" i="0">
+              <a:rPr sz="1700" b="0" i="0">
                 <a:solidFill>
                   <a:srgbClr val="1A1A1A"/>
                 </a:solidFill>
@@ -3631,49 +3591,33 @@
           <a:p>
             <a:pPr>
               <a:spcAft>
-                <a:spcPts val="1000"/>
+                <a:spcPts val="800"/>
               </a:spcAft>
             </a:pPr>
             <a:r>
-              <a:rPr sz="1900" b="0" i="0">
+              <a:rPr sz="1700" b="0" i="0">
                 <a:solidFill>
                   <a:srgbClr val="1A1A1A"/>
                 </a:solidFill>
                 <a:latin typeface="Arial"/>
               </a:rPr>
-              <a:t>•  The dynamic programming principle</a:t>
+              <a:t>•  The dynamic programming principle (Bellman)</a:t>
             </a:r>
           </a:p>
           <a:p>
             <a:pPr>
               <a:spcAft>
-                <a:spcPts val="1000"/>
+                <a:spcPts val="800"/>
               </a:spcAft>
             </a:pPr>
             <a:r>
-              <a:rPr sz="1900" b="0" i="0">
+              <a:rPr sz="1700" b="0" i="0">
                 <a:solidFill>
                   <a:srgbClr val="1A1A1A"/>
                 </a:solidFill>
                 <a:latin typeface="Arial"/>
               </a:rPr>
-              <a:t>•  The infinitesimal generator</a:t>
-            </a:r>
-          </a:p>
-          <a:p>
-            <a:pPr>
-              <a:spcAft>
-                <a:spcPts val="1000"/>
-              </a:spcAft>
-            </a:pPr>
-            <a:r>
-              <a:rPr sz="1900" b="0" i="0">
-                <a:solidFill>
-                  <a:srgbClr val="1A1A1A"/>
-                </a:solidFill>
-                <a:latin typeface="Arial"/>
-              </a:rPr>
-              <a:t>•  Deriving the HJB equation; boundary/terminal conditions</a:t>
+              <a:t>•  The infinitesimal generator and the HJB equation</a:t>
             </a:r>
           </a:p>
         </p:txBody>
@@ -3737,13 +3681,13 @@
           <a:noFill/>
         </p:spPr>
         <p:txBody>
-          <a:bodyPr wrap="none">
+          <a:bodyPr wrap="square">
             <a:spAutoFit/>
           </a:bodyPr>
           <a:lstStyle/>
           <a:p>
             <a:r>
-              <a:rPr sz="2600" b="1" i="0">
+              <a:rPr sz="2400" b="1" i="0">
                 <a:solidFill>
                   <a:srgbClr val="990000"/>
                 </a:solidFill>
@@ -3762,8 +3706,8 @@
         </p:nvSpPr>
         <p:spPr>
           <a:xfrm>
-            <a:off x="457200" y="1234440"/>
-            <a:ext cx="11247120" cy="31750"/>
+            <a:off x="457200" y="1371600"/>
+            <a:ext cx="11247120" cy="27940"/>
           </a:xfrm>
           <a:prstGeom prst="rect">
             <a:avLst/>
@@ -3805,7 +3749,7 @@
         </p:nvSpPr>
         <p:spPr>
           <a:xfrm>
-            <a:off x="640080" y="1554480"/>
+            <a:off x="640080" y="1600200"/>
             <a:ext cx="10972800" cy="4937760"/>
           </a:xfrm>
           <a:prstGeom prst="rect">
@@ -3821,65 +3765,49 @@
           <a:p>
             <a:pPr>
               <a:spcAft>
-                <a:spcPts val="1000"/>
+                <a:spcPts val="800"/>
               </a:spcAft>
             </a:pPr>
             <a:r>
-              <a:rPr sz="1900" b="0" i="0">
+              <a:rPr sz="1700" b="0" i="0">
                 <a:solidFill>
                   <a:srgbClr val="1A1A1A"/>
                 </a:solidFill>
                 <a:latin typeface="Arial"/>
               </a:rPr>
-              <a:t>•  The verification theorem: a smooth HJB solution IS the value function</a:t>
+              <a:t>•  Verification theorem: a smooth HJB solution IS the value function</a:t>
             </a:r>
           </a:p>
           <a:p>
             <a:pPr>
               <a:spcAft>
-                <a:spcPts val="1000"/>
+                <a:spcPts val="800"/>
               </a:spcAft>
             </a:pPr>
             <a:r>
-              <a:rPr sz="1900" b="0" i="0">
+              <a:rPr sz="1700" b="0" i="0">
                 <a:solidFill>
                   <a:srgbClr val="1A1A1A"/>
                 </a:solidFill>
                 <a:latin typeface="Arial"/>
               </a:rPr>
-              <a:t>•  Viscosity solutions: when value functions are non-smooth</a:t>
+              <a:t>•  CARA vs CRRA: where wealth enters the optimal policy</a:t>
             </a:r>
           </a:p>
           <a:p>
             <a:pPr>
               <a:spcAft>
-                <a:spcPts val="1000"/>
+                <a:spcPts val="800"/>
               </a:spcAft>
             </a:pPr>
             <a:r>
-              <a:rPr sz="1900" b="0" i="0">
+              <a:rPr sz="1700" b="0" i="0">
                 <a:solidFill>
                   <a:srgbClr val="1A1A1A"/>
                 </a:solidFill>
                 <a:latin typeface="Arial"/>
               </a:rPr>
-              <a:t>•  CARA vs. CRRA vs. HARA</a:t>
-            </a:r>
-          </a:p>
-          <a:p>
-            <a:pPr>
-              <a:spcAft>
-                <a:spcPts val="1000"/>
-              </a:spcAft>
-            </a:pPr>
-            <a:r>
-              <a:rPr sz="1900" b="0" i="0">
-                <a:solidFill>
-                  <a:srgbClr val="1A1A1A"/>
-                </a:solidFill>
-                <a:latin typeface="Arial"/>
-              </a:rPr>
-              <a:t>•  Why CARA decouples the value function from wealth</a:t>
+              <a:t>•  Why market making uses CARA</a:t>
             </a:r>
           </a:p>
         </p:txBody>
@@ -3918,7 +3846,7 @@
         </p:blipFill>
         <p:spPr>
           <a:xfrm>
-            <a:off x="9784080" y="274320"/>
+            <a:off x="9784080" y="228600"/>
             <a:ext cx="2011680" cy="316653"/>
           </a:xfrm>
           <a:prstGeom prst="rect">
@@ -3934,8 +3862,8 @@
         </p:nvSpPr>
         <p:spPr>
           <a:xfrm>
-            <a:off x="457200" y="457200"/>
-            <a:ext cx="8961120" cy="822960"/>
+            <a:off x="457200" y="411480"/>
+            <a:ext cx="8961120" cy="731520"/>
           </a:xfrm>
           <a:prstGeom prst="rect">
             <a:avLst/>
@@ -3949,131 +3877,41 @@
           <a:lstStyle/>
           <a:p>
             <a:r>
-              <a:rPr sz="2600" b="1" i="0">
+              <a:rPr sz="2200" b="1" i="0">
                 <a:solidFill>
                   <a:srgbClr val="990000"/>
                 </a:solidFill>
                 <a:latin typeface="Arial"/>
               </a:rPr>
-              <a:t>Recitation</a:t>
-            </a:r>
-          </a:p>
-        </p:txBody>
-      </p:sp>
-      <p:sp>
-        <p:nvSpPr>
-          <p:cNvPr id="4" name="Rectangle 3"/>
-          <p:cNvSpPr/>
+              <a:t>Illustration</a:t>
+            </a:r>
+          </a:p>
+        </p:txBody>
+      </p:sp>
+      <p:pic>
+        <p:nvPicPr>
+          <p:cNvPr id="4" name="Picture 3" descr="week04.png"/>
+          <p:cNvPicPr>
+            <a:picLocks noChangeAspect="1"/>
+          </p:cNvPicPr>
           <p:nvPr/>
-        </p:nvSpPr>
-        <p:spPr>
-          <a:xfrm>
-            <a:off x="457200" y="1234440"/>
-            <a:ext cx="11247120" cy="31750"/>
+        </p:nvPicPr>
+        <p:blipFill>
+          <a:blip r:embed="rId3"/>
+          <a:stretch>
+            <a:fillRect/>
+          </a:stretch>
+        </p:blipFill>
+        <p:spPr>
+          <a:xfrm>
+            <a:off x="1280160" y="1371600"/>
+            <a:ext cx="9601200" cy="5256766"/>
           </a:xfrm>
           <a:prstGeom prst="rect">
             <a:avLst/>
           </a:prstGeom>
-          <a:solidFill>
-            <a:srgbClr val="CC0000"/>
-          </a:solidFill>
-          <a:ln>
-            <a:noFill/>
-          </a:ln>
-        </p:spPr>
-        <p:style>
-          <a:lnRef idx="1">
-            <a:schemeClr val="accent1"/>
-          </a:lnRef>
-          <a:fillRef idx="3">
-            <a:schemeClr val="accent1"/>
-          </a:fillRef>
-          <a:effectRef idx="2">
-            <a:schemeClr val="accent1"/>
-          </a:effectRef>
-          <a:fontRef idx="minor">
-            <a:schemeClr val="lt1"/>
-          </a:fontRef>
-        </p:style>
-        <p:txBody>
-          <a:bodyPr rtlCol="0" anchor="ctr"/>
-          <a:lstStyle/>
-          <a:p>
-            <a:pPr algn="ctr"/>
-          </a:p>
-        </p:txBody>
-      </p:sp>
-      <p:sp>
-        <p:nvSpPr>
-          <p:cNvPr id="5" name="TextBox 4"/>
-          <p:cNvSpPr txBox="1"/>
-          <p:nvPr/>
-        </p:nvSpPr>
-        <p:spPr>
-          <a:xfrm>
-            <a:off x="640080" y="1554480"/>
-            <a:ext cx="10972800" cy="4937760"/>
-          </a:xfrm>
-          <a:prstGeom prst="rect">
-            <a:avLst/>
-          </a:prstGeom>
-          <a:noFill/>
-        </p:spPr>
-        <p:txBody>
-          <a:bodyPr wrap="square">
-            <a:spAutoFit/>
-          </a:bodyPr>
-          <a:lstStyle/>
-          <a:p>
-            <a:pPr>
-              <a:spcAft>
-                <a:spcPts val="1000"/>
-              </a:spcAft>
-            </a:pPr>
-            <a:r>
-              <a:rPr sz="1900" b="0" i="0">
-                <a:solidFill>
-                  <a:srgbClr val="1A1A1A"/>
-                </a:solidFill>
-                <a:latin typeface="Arial"/>
-              </a:rPr>
-              <a:t>•  Solve the Merton problem under CARA, then CRRA</a:t>
-            </a:r>
-          </a:p>
-          <a:p>
-            <a:pPr>
-              <a:spcAft>
-                <a:spcPts val="1000"/>
-              </a:spcAft>
-            </a:pPr>
-            <a:r>
-              <a:rPr sz="1900" b="0" i="0">
-                <a:solidFill>
-                  <a:srgbClr val="1A1A1A"/>
-                </a:solidFill>
-                <a:latin typeface="Arial"/>
-              </a:rPr>
-              <a:t>•  Compare the two solutions side by side</a:t>
-            </a:r>
-          </a:p>
-          <a:p>
-            <a:pPr>
-              <a:spcAft>
-                <a:spcPts val="1000"/>
-              </a:spcAft>
-            </a:pPr>
-            <a:r>
-              <a:rPr sz="1900" b="0" i="0">
-                <a:solidFill>
-                  <a:srgbClr val="1A1A1A"/>
-                </a:solidFill>
-                <a:latin typeface="Arial"/>
-              </a:rPr>
-              <a:t>•  Recognize the recurring HJB -&gt; ansatz -&gt; ODE -&gt; solution pattern</a:t>
-            </a:r>
-          </a:p>
-        </p:txBody>
-      </p:sp>
+        </p:spPr>
+      </p:pic>
     </p:spTree>
   </p:cSld>
   <p:clrMapOvr>
@@ -4133,19 +3971,30 @@
           <a:noFill/>
         </p:spPr>
         <p:txBody>
-          <a:bodyPr wrap="none">
+          <a:bodyPr wrap="square">
             <a:spAutoFit/>
           </a:bodyPr>
           <a:lstStyle/>
           <a:p>
             <a:r>
-              <a:rPr sz="2600" b="1" i="0">
+              <a:rPr sz="2400" b="1" i="0">
                 <a:solidFill>
                   <a:srgbClr val="990000"/>
                 </a:solidFill>
                 <a:latin typeface="Arial"/>
               </a:rPr>
-              <a:t>Reading &amp; Problem Set 4 (Python/PyTorch)</a:t>
+              <a:t>Key Equations &amp; Why We Choose Them</a:t>
+            </a:r>
+          </a:p>
+          <a:p>
+            <a:r>
+              <a:rPr sz="1300" b="0" i="1">
+                <a:solidFill>
+                  <a:srgbClr val="6D6D6D"/>
+                </a:solidFill>
+                <a:latin typeface="Arial"/>
+              </a:rPr>
+              <a:t>Full derivations in the PDF deck</a:t>
             </a:r>
           </a:p>
         </p:txBody>
@@ -4158,8 +4007,8 @@
         </p:nvSpPr>
         <p:spPr>
           <a:xfrm>
-            <a:off x="457200" y="1234440"/>
-            <a:ext cx="11247120" cy="31750"/>
+            <a:off x="457200" y="1371600"/>
+            <a:ext cx="11247120" cy="27940"/>
           </a:xfrm>
           <a:prstGeom prst="rect">
             <a:avLst/>
@@ -4201,7 +4050,7 @@
         </p:nvSpPr>
         <p:spPr>
           <a:xfrm>
-            <a:off x="640080" y="1554480"/>
+            <a:off x="640080" y="1600200"/>
             <a:ext cx="10972800" cy="4937760"/>
           </a:xfrm>
           <a:prstGeom prst="rect">
@@ -4217,33 +4066,774 @@
           <a:p>
             <a:pPr>
               <a:spcAft>
-                <a:spcPts val="1000"/>
+                <a:spcPts val="500"/>
               </a:spcAft>
             </a:pPr>
             <a:r>
-              <a:rPr sz="1900" b="0" i="0">
+              <a:rPr sz="1200" b="0" i="0">
+                <a:solidFill>
+                  <a:srgbClr val="1A1A1A"/>
+                </a:solidFill>
+                <a:latin typeface="Consolas"/>
+              </a:rPr>
+              <a:t>    V(t,x)=\sup_{u}\ \mathbb{E}\!\left[\int_t^T f(s,X_s,u_s)\,ds + g(X_T)\right]</a:t>
+            </a:r>
+          </a:p>
+          <a:p>
+            <a:pPr>
+              <a:spcAft>
+                <a:spcPts val="500"/>
+              </a:spcAft>
+            </a:pPr>
+            <a:r>
+              <a:rPr sz="1200" b="0" i="0">
                 <a:solidFill>
                   <a:srgbClr val="1A1A1A"/>
                 </a:solidFill>
                 <a:latin typeface="Arial"/>
               </a:rPr>
-              <a:t>•  Pham (2009) Ch. 3-4; Cartea-Jaikumar-Penalva Ch. 6</a:t>
+              <a:t>•  why: The value function is the best achievable expected reward from $(t,x)$ onward. We define the whole problem through $V$ because Bellman's principle then gives a local (differential) equation instead of an intractable global optimization.</a:t>
             </a:r>
           </a:p>
           <a:p>
             <a:pPr>
               <a:spcAft>
-                <a:spcPts val="1000"/>
+                <a:spcPts val="500"/>
               </a:spcAft>
             </a:pPr>
             <a:r>
-              <a:rPr sz="1900" b="0" i="0">
+              <a:rPr sz="1200" b="0" i="0">
+                <a:solidFill>
+                  <a:srgbClr val="1A1A1A"/>
+                </a:solidFill>
+                <a:latin typeface="Consolas"/>
+              </a:rPr>
+              <a:t>    V(t,x)=\sup_u \mathbb{E}\big[V(t{+}dt, X_{t+dt}) + f\,dt\big]</a:t>
+            </a:r>
+          </a:p>
+          <a:p>
+            <a:pPr>
+              <a:spcAft>
+                <a:spcPts val="500"/>
+              </a:spcAft>
+            </a:pPr>
+            <a:r>
+              <a:rPr sz="1200" b="0" i="0">
                 <a:solidFill>
                   <a:srgbClr val="1A1A1A"/>
                 </a:solidFill>
                 <a:latin typeface="Arial"/>
               </a:rPr>
-              <a:t>•  PS4: Merton CRRA/CARA, Almgren-Chriss, HJB-residual check</a:t>
+              <a:t>•  why: The dynamic programming principle: an optimal policy is optimal from every later state too. Expanding $V(t+dt,\cdot)$ with Ito's lemma turns this into the HJB PDE.</a:t>
+            </a:r>
+          </a:p>
+          <a:p>
+            <a:pPr>
+              <a:spcAft>
+                <a:spcPts val="500"/>
+              </a:spcAft>
+            </a:pPr>
+            <a:r>
+              <a:rPr sz="1200" b="0" i="0">
+                <a:solidFill>
+                  <a:srgbClr val="1A1A1A"/>
+                </a:solidFill>
+                <a:latin typeface="Consolas"/>
+              </a:rPr>
+              <a:t>    \partial_t V + \sup_{u}\big\{\mathcal{L}^u V + f(t,x,u)\big\}=0,\quad V(T,x)=g(x)</a:t>
+            </a:r>
+          </a:p>
+          <a:p>
+            <a:pPr>
+              <a:spcAft>
+                <a:spcPts val="500"/>
+              </a:spcAft>
+            </a:pPr>
+            <a:r>
+              <a:rPr sz="1200" b="0" i="0">
+                <a:solidFill>
+                  <a:srgbClr val="1A1A1A"/>
+                </a:solidFill>
+                <a:latin typeface="Arial"/>
+              </a:rPr>
+              <a:t>•  why: The HJB equation. $\mathcal{L}^u$ is the generator of the controlled diffusion; the $\sup$ is the instantaneous optimal control. This is the engine behind every model in the course -- Avellaneda-Stoikov is one special case.</a:t>
+            </a:r>
+          </a:p>
+          <a:p>
+            <a:pPr>
+              <a:spcAft>
+                <a:spcPts val="500"/>
+              </a:spcAft>
+            </a:pPr>
+            <a:r>
+              <a:rPr sz="1200" b="0" i="0">
+                <a:solidFill>
+                  <a:srgbClr val="1A1A1A"/>
+                </a:solidFill>
+                <a:latin typeface="Consolas"/>
+              </a:rPr>
+              <a:t>    \text{CARA: } U(w)=-e^{-\gamma w}\ \Rightarrow\ \text{policy independent of } w</a:t>
+            </a:r>
+          </a:p>
+          <a:p>
+            <a:pPr>
+              <a:spcAft>
+                <a:spcPts val="500"/>
+              </a:spcAft>
+            </a:pPr>
+            <a:r>
+              <a:rPr sz="1200" b="0" i="0">
+                <a:solidFill>
+                  <a:srgbClr val="1A1A1A"/>
+                </a:solidFill>
+                <a:latin typeface="Arial"/>
+              </a:rPr>
+              <a:t>•  why: Constant absolute risk aversion makes marginal utility scale-free in wealth, so the optimal quotes do not move with the cash balance. CRRA ($U=w^{1-\gamma}/(1-\gamma)$) instead makes the policy scale WITH wealth -- natural for investment, awkward for a desk.</a:t>
+            </a:r>
+          </a:p>
+        </p:txBody>
+      </p:sp>
+    </p:spTree>
+  </p:cSld>
+  <p:clrMapOvr>
+    <a:masterClrMapping/>
+  </p:clrMapOvr>
+</p:sld>
+</file>
+
+<file path=ppt/slides/slide7.xml><?xml version="1.0" encoding="utf-8"?>
+<p:sld xmlns:a="http://schemas.openxmlformats.org/drawingml/2006/main" xmlns:p="http://schemas.openxmlformats.org/presentationml/2006/main" xmlns:r="http://schemas.openxmlformats.org/officeDocument/2006/relationships">
+  <p:cSld>
+    <p:spTree>
+      <p:nvGrpSpPr>
+        <p:cNvPr id="1" name=""/>
+        <p:cNvGrpSpPr/>
+        <p:nvPr/>
+      </p:nvGrpSpPr>
+      <p:grpSpPr/>
+      <p:pic>
+        <p:nvPicPr>
+          <p:cNvPr id="2" name="Picture 1" descr="ncsu_logo.png"/>
+          <p:cNvPicPr>
+            <a:picLocks noChangeAspect="1"/>
+          </p:cNvPicPr>
+          <p:nvPr/>
+        </p:nvPicPr>
+        <p:blipFill>
+          <a:blip r:embed="rId2"/>
+          <a:stretch>
+            <a:fillRect/>
+          </a:stretch>
+        </p:blipFill>
+        <p:spPr>
+          <a:xfrm>
+            <a:off x="9784080" y="274320"/>
+            <a:ext cx="2011680" cy="316653"/>
+          </a:xfrm>
+          <a:prstGeom prst="rect">
+            <a:avLst/>
+          </a:prstGeom>
+        </p:spPr>
+      </p:pic>
+      <p:sp>
+        <p:nvSpPr>
+          <p:cNvPr id="3" name="TextBox 2"/>
+          <p:cNvSpPr txBox="1"/>
+          <p:nvPr/>
+        </p:nvSpPr>
+        <p:spPr>
+          <a:xfrm>
+            <a:off x="457200" y="457200"/>
+            <a:ext cx="8961120" cy="822960"/>
+          </a:xfrm>
+          <a:prstGeom prst="rect">
+            <a:avLst/>
+          </a:prstGeom>
+          <a:noFill/>
+        </p:spPr>
+        <p:txBody>
+          <a:bodyPr wrap="square">
+            <a:spAutoFit/>
+          </a:bodyPr>
+          <a:lstStyle/>
+          <a:p>
+            <a:r>
+              <a:rPr sz="2400" b="1" i="0">
+                <a:solidFill>
+                  <a:srgbClr val="990000"/>
+                </a:solidFill>
+                <a:latin typeface="Arial"/>
+              </a:rPr>
+              <a:t>Getting the Data from Coincall</a:t>
+            </a:r>
+          </a:p>
+          <a:p>
+            <a:r>
+              <a:rPr sz="1300" b="0" i="1">
+                <a:solidFill>
+                  <a:srgbClr val="6D6D6D"/>
+                </a:solidFill>
+                <a:latin typeface="Arial"/>
+              </a:rPr>
+              <a:t>Cross-check exact paths at https://docs.coincall.com/</a:t>
+            </a:r>
+          </a:p>
+        </p:txBody>
+      </p:sp>
+      <p:sp>
+        <p:nvSpPr>
+          <p:cNvPr id="4" name="Rectangle 3"/>
+          <p:cNvSpPr/>
+          <p:nvPr/>
+        </p:nvSpPr>
+        <p:spPr>
+          <a:xfrm>
+            <a:off x="457200" y="1371600"/>
+            <a:ext cx="11247120" cy="27940"/>
+          </a:xfrm>
+          <a:prstGeom prst="rect">
+            <a:avLst/>
+          </a:prstGeom>
+          <a:solidFill>
+            <a:srgbClr val="CC0000"/>
+          </a:solidFill>
+          <a:ln>
+            <a:noFill/>
+          </a:ln>
+        </p:spPr>
+        <p:style>
+          <a:lnRef idx="1">
+            <a:schemeClr val="accent1"/>
+          </a:lnRef>
+          <a:fillRef idx="3">
+            <a:schemeClr val="accent1"/>
+          </a:fillRef>
+          <a:effectRef idx="2">
+            <a:schemeClr val="accent1"/>
+          </a:effectRef>
+          <a:fontRef idx="minor">
+            <a:schemeClr val="lt1"/>
+          </a:fontRef>
+        </p:style>
+        <p:txBody>
+          <a:bodyPr rtlCol="0" anchor="ctr"/>
+          <a:lstStyle/>
+          <a:p>
+            <a:pPr algn="ctr"/>
+          </a:p>
+        </p:txBody>
+      </p:sp>
+      <p:sp>
+        <p:nvSpPr>
+          <p:cNvPr id="5" name="TextBox 4"/>
+          <p:cNvSpPr txBox="1"/>
+          <p:nvPr/>
+        </p:nvSpPr>
+        <p:spPr>
+          <a:xfrm>
+            <a:off x="640080" y="1600200"/>
+            <a:ext cx="10972800" cy="4937760"/>
+          </a:xfrm>
+          <a:prstGeom prst="rect">
+            <a:avLst/>
+          </a:prstGeom>
+          <a:noFill/>
+        </p:spPr>
+        <p:txBody>
+          <a:bodyPr wrap="square">
+            <a:spAutoFit/>
+          </a:bodyPr>
+          <a:lstStyle/>
+          <a:p>
+            <a:pPr>
+              <a:spcAft>
+                <a:spcPts val="500"/>
+              </a:spcAft>
+            </a:pPr>
+            <a:r>
+              <a:rPr sz="1200" b="0" i="0">
+                <a:solidFill>
+                  <a:srgbClr val="1A1A1A"/>
+                </a:solidFill>
+                <a:latin typeface="Arial"/>
+              </a:rPr>
+              <a:t>•  Theory week -- no Coincall data required.</a:t>
+            </a:r>
+          </a:p>
+          <a:p>
+            <a:pPr>
+              <a:spcAft>
+                <a:spcPts val="500"/>
+              </a:spcAft>
+            </a:pPr>
+            <a:r>
+              <a:rPr sz="1200" b="0" i="0">
+                <a:solidFill>
+                  <a:srgbClr val="1A1A1A"/>
+                </a:solidFill>
+                <a:latin typeface="Arial"/>
+              </a:rPr>
+              <a:t>•  Optional: estimate drift/vol from perp klines to parameterize Merton.</a:t>
+            </a:r>
+          </a:p>
+        </p:txBody>
+      </p:sp>
+    </p:spTree>
+  </p:cSld>
+  <p:clrMapOvr>
+    <a:masterClrMapping/>
+  </p:clrMapOvr>
+</p:sld>
+</file>
+
+<file path=ppt/slides/slide8.xml><?xml version="1.0" encoding="utf-8"?>
+<p:sld xmlns:a="http://schemas.openxmlformats.org/drawingml/2006/main" xmlns:p="http://schemas.openxmlformats.org/presentationml/2006/main" xmlns:r="http://schemas.openxmlformats.org/officeDocument/2006/relationships">
+  <p:cSld>
+    <p:spTree>
+      <p:nvGrpSpPr>
+        <p:cNvPr id="1" name=""/>
+        <p:cNvGrpSpPr/>
+        <p:nvPr/>
+      </p:nvGrpSpPr>
+      <p:grpSpPr/>
+      <p:sp>
+        <p:nvSpPr>
+          <p:cNvPr id="2" name="TextBox 1"/>
+          <p:cNvSpPr txBox="1"/>
+          <p:nvPr/>
+        </p:nvSpPr>
+        <p:spPr>
+          <a:xfrm>
+            <a:off x="457200" y="365760"/>
+            <a:ext cx="11247120" cy="640080"/>
+          </a:xfrm>
+          <a:prstGeom prst="rect">
+            <a:avLst/>
+          </a:prstGeom>
+          <a:noFill/>
+        </p:spPr>
+        <p:txBody>
+          <a:bodyPr wrap="none">
+            <a:spAutoFit/>
+          </a:bodyPr>
+          <a:lstStyle/>
+          <a:p>
+            <a:r>
+              <a:rPr sz="1800" b="1" i="0">
+                <a:solidFill>
+                  <a:srgbClr val="990000"/>
+                </a:solidFill>
+                <a:latin typeface="Arial"/>
+              </a:rPr>
+              <a:t>Code — week4_merton.py -- HJB value iteration (CARA) in PyTorch</a:t>
+            </a:r>
+          </a:p>
+        </p:txBody>
+      </p:sp>
+      <p:sp>
+        <p:nvSpPr>
+          <p:cNvPr id="3" name="Rectangle 2"/>
+          <p:cNvSpPr/>
+          <p:nvPr/>
+        </p:nvSpPr>
+        <p:spPr>
+          <a:xfrm>
+            <a:off x="457200" y="1097280"/>
+            <a:ext cx="11247120" cy="5394960"/>
+          </a:xfrm>
+          <a:prstGeom prst="rect">
+            <a:avLst/>
+          </a:prstGeom>
+          <a:solidFill>
+            <a:srgbClr val="F5F5F5"/>
+          </a:solidFill>
+          <a:ln w="9525">
+            <a:solidFill>
+              <a:srgbClr val="6D6D6D"/>
+            </a:solidFill>
+          </a:ln>
+        </p:spPr>
+        <p:style>
+          <a:lnRef idx="1">
+            <a:schemeClr val="accent1"/>
+          </a:lnRef>
+          <a:fillRef idx="3">
+            <a:schemeClr val="accent1"/>
+          </a:fillRef>
+          <a:effectRef idx="2">
+            <a:schemeClr val="accent1"/>
+          </a:effectRef>
+          <a:fontRef idx="minor">
+            <a:schemeClr val="lt1"/>
+          </a:fontRef>
+        </p:style>
+        <p:txBody>
+          <a:bodyPr rtlCol="0" anchor="ctr" wrap="square" lIns="182880" tIns="91440"/>
+          <a:lstStyle/>
+          <a:p>
+            <a:pPr algn="ctr">
+              <a:spcAft>
+                <a:spcPts val="0"/>
+              </a:spcAft>
+            </a:pPr>
+            <a:r>
+              <a:rPr sz="1100" b="0" i="0">
+                <a:solidFill>
+                  <a:srgbClr val="1A1A1A"/>
+                </a:solidFill>
+                <a:latin typeface="Consolas"/>
+              </a:rPr>
+              <a:t>import torch</a:t>
+            </a:r>
+          </a:p>
+          <a:p>
+            <a:pPr>
+              <a:spcAft>
+                <a:spcPts val="0"/>
+              </a:spcAft>
+            </a:pPr>
+            <a:r>
+              <a:rPr sz="1100" b="0" i="0">
+                <a:solidFill>
+                  <a:srgbClr val="1A1A1A"/>
+                </a:solidFill>
+                <a:latin typeface="Consolas"/>
+              </a:rPr>
+              <a:t># Merton under CARA, solved by backward value iteration on a wealth grid.</a:t>
+            </a:r>
+          </a:p>
+          <a:p>
+            <a:pPr>
+              <a:spcAft>
+                <a:spcPts val="0"/>
+              </a:spcAft>
+            </a:pPr>
+            <a:r>
+              <a:rPr sz="1100" b="0" i="0">
+                <a:solidFill>
+                  <a:srgbClr val="1A1A1A"/>
+                </a:solidFill>
+                <a:latin typeface="Consolas"/>
+              </a:rPr>
+              <a:t>w = torch.linspace(-5, 5, 401); dt = 1e-3; mu, r, sig, gam = 0.08, 0.02, 0.2, 1.0</a:t>
+            </a:r>
+          </a:p>
+          <a:p>
+            <a:pPr>
+              <a:spcAft>
+                <a:spcPts val="0"/>
+              </a:spcAft>
+            </a:pPr>
+            <a:r>
+              <a:rPr sz="1100" b="0" i="0">
+                <a:solidFill>
+                  <a:srgbClr val="1A1A1A"/>
+                </a:solidFill>
+                <a:latin typeface="Consolas"/>
+              </a:rPr>
+              <a:t>V = -torch.exp(-gam * w)                      # terminal utility</a:t>
+            </a:r>
+          </a:p>
+          <a:p>
+            <a:pPr>
+              <a:spcAft>
+                <a:spcPts val="0"/>
+              </a:spcAft>
+            </a:pPr>
+            <a:r>
+              <a:rPr sz="1100" b="0" i="0">
+                <a:solidFill>
+                  <a:srgbClr val="1A1A1A"/>
+                </a:solidFill>
+                <a:latin typeface="Consolas"/>
+              </a:rPr>
+              <a:t>for _ in range(1000):                         # march backward in time</a:t>
+            </a:r>
+          </a:p>
+          <a:p>
+            <a:pPr>
+              <a:spcAft>
+                <a:spcPts val="0"/>
+              </a:spcAft>
+            </a:pPr>
+            <a:r>
+              <a:rPr sz="1100" b="0" i="0">
+                <a:solidFill>
+                  <a:srgbClr val="1A1A1A"/>
+                </a:solidFill>
+                <a:latin typeface="Consolas"/>
+              </a:rPr>
+              <a:t>    # optimal risky holding pi* = (mu - r)/(gam*sig^2) is wealth-independent (CARA)</a:t>
+            </a:r>
+          </a:p>
+          <a:p>
+            <a:pPr>
+              <a:spcAft>
+                <a:spcPts val="0"/>
+              </a:spcAft>
+            </a:pPr>
+            <a:r>
+              <a:rPr sz="1100" b="0" i="0">
+                <a:solidFill>
+                  <a:srgbClr val="1A1A1A"/>
+                </a:solidFill>
+                <a:latin typeface="Consolas"/>
+              </a:rPr>
+              <a:t>    pi = (mu - r) / (gam * sig**2)</a:t>
+            </a:r>
+          </a:p>
+          <a:p>
+            <a:pPr>
+              <a:spcAft>
+                <a:spcPts val="0"/>
+              </a:spcAft>
+            </a:pPr>
+            <a:r>
+              <a:rPr sz="1100" b="0" i="0">
+                <a:solidFill>
+                  <a:srgbClr val="1A1A1A"/>
+                </a:solidFill>
+                <a:latin typeface="Consolas"/>
+              </a:rPr>
+              <a:t>    drift = (r*w + pi*(mu - r))</a:t>
+            </a:r>
+          </a:p>
+          <a:p>
+            <a:pPr>
+              <a:spcAft>
+                <a:spcPts val="0"/>
+              </a:spcAft>
+            </a:pPr>
+            <a:r>
+              <a:rPr sz="1100" b="0" i="0">
+                <a:solidFill>
+                  <a:srgbClr val="1A1A1A"/>
+                </a:solidFill>
+                <a:latin typeface="Consolas"/>
+              </a:rPr>
+              <a:t>    diff  = 0.5 * (pi*sig)**2</a:t>
+            </a:r>
+          </a:p>
+          <a:p>
+            <a:pPr>
+              <a:spcAft>
+                <a:spcPts val="0"/>
+              </a:spcAft>
+            </a:pPr>
+            <a:r>
+              <a:rPr sz="1100" b="0" i="0">
+                <a:solidFill>
+                  <a:srgbClr val="1A1A1A"/>
+                </a:solidFill>
+                <a:latin typeface="Consolas"/>
+              </a:rPr>
+              <a:t>    dV = torch.gradient(V, spacing=(w[1]-w[0]).item())[0]</a:t>
+            </a:r>
+          </a:p>
+          <a:p>
+            <a:pPr>
+              <a:spcAft>
+                <a:spcPts val="0"/>
+              </a:spcAft>
+            </a:pPr>
+            <a:r>
+              <a:rPr sz="1100" b="0" i="0">
+                <a:solidFill>
+                  <a:srgbClr val="1A1A1A"/>
+                </a:solidFill>
+                <a:latin typeface="Consolas"/>
+              </a:rPr>
+              <a:t>    d2V = torch.gradient(dV, spacing=(w[1]-w[0]).item())[0]</a:t>
+            </a:r>
+          </a:p>
+          <a:p>
+            <a:pPr>
+              <a:spcAft>
+                <a:spcPts val="0"/>
+              </a:spcAft>
+            </a:pPr>
+            <a:r>
+              <a:rPr sz="1100" b="0" i="0">
+                <a:solidFill>
+                  <a:srgbClr val="1A1A1A"/>
+                </a:solidFill>
+                <a:latin typeface="Consolas"/>
+              </a:rPr>
+              <a:t>    V = V + dt * (drift*dV + diff*d2V)</a:t>
+            </a:r>
+          </a:p>
+          <a:p>
+            <a:pPr>
+              <a:spcAft>
+                <a:spcPts val="0"/>
+              </a:spcAft>
+            </a:pPr>
+            <a:r>
+              <a:rPr sz="1100" b="0" i="0">
+                <a:solidFill>
+                  <a:srgbClr val="1A1A1A"/>
+                </a:solidFill>
+                <a:latin typeface="Consolas"/>
+              </a:rPr>
+              <a:t>print("pi* (constant in wealth):", (mu - r)/(gam*sig**2))</a:t>
+            </a:r>
+          </a:p>
+        </p:txBody>
+      </p:sp>
+    </p:spTree>
+  </p:cSld>
+  <p:clrMapOvr>
+    <a:masterClrMapping/>
+  </p:clrMapOvr>
+</p:sld>
+</file>
+
+<file path=ppt/slides/slide9.xml><?xml version="1.0" encoding="utf-8"?>
+<p:sld xmlns:a="http://schemas.openxmlformats.org/drawingml/2006/main" xmlns:p="http://schemas.openxmlformats.org/presentationml/2006/main" xmlns:r="http://schemas.openxmlformats.org/officeDocument/2006/relationships">
+  <p:cSld>
+    <p:spTree>
+      <p:nvGrpSpPr>
+        <p:cNvPr id="1" name=""/>
+        <p:cNvGrpSpPr/>
+        <p:nvPr/>
+      </p:nvGrpSpPr>
+      <p:grpSpPr/>
+      <p:pic>
+        <p:nvPicPr>
+          <p:cNvPr id="2" name="Picture 1" descr="ncsu_logo.png"/>
+          <p:cNvPicPr>
+            <a:picLocks noChangeAspect="1"/>
+          </p:cNvPicPr>
+          <p:nvPr/>
+        </p:nvPicPr>
+        <p:blipFill>
+          <a:blip r:embed="rId2"/>
+          <a:stretch>
+            <a:fillRect/>
+          </a:stretch>
+        </p:blipFill>
+        <p:spPr>
+          <a:xfrm>
+            <a:off x="9784080" y="274320"/>
+            <a:ext cx="2011680" cy="316653"/>
+          </a:xfrm>
+          <a:prstGeom prst="rect">
+            <a:avLst/>
+          </a:prstGeom>
+        </p:spPr>
+      </p:pic>
+      <p:sp>
+        <p:nvSpPr>
+          <p:cNvPr id="3" name="TextBox 2"/>
+          <p:cNvSpPr txBox="1"/>
+          <p:nvPr/>
+        </p:nvSpPr>
+        <p:spPr>
+          <a:xfrm>
+            <a:off x="457200" y="457200"/>
+            <a:ext cx="8961120" cy="822960"/>
+          </a:xfrm>
+          <a:prstGeom prst="rect">
+            <a:avLst/>
+          </a:prstGeom>
+          <a:noFill/>
+        </p:spPr>
+        <p:txBody>
+          <a:bodyPr wrap="square">
+            <a:spAutoFit/>
+          </a:bodyPr>
+          <a:lstStyle/>
+          <a:p>
+            <a:r>
+              <a:rPr sz="2400" b="1" i="0">
+                <a:solidFill>
+                  <a:srgbClr val="990000"/>
+                </a:solidFill>
+                <a:latin typeface="Arial"/>
+              </a:rPr>
+              <a:t>Reading</a:t>
+            </a:r>
+          </a:p>
+        </p:txBody>
+      </p:sp>
+      <p:sp>
+        <p:nvSpPr>
+          <p:cNvPr id="4" name="Rectangle 3"/>
+          <p:cNvSpPr/>
+          <p:nvPr/>
+        </p:nvSpPr>
+        <p:spPr>
+          <a:xfrm>
+            <a:off x="457200" y="1371600"/>
+            <a:ext cx="11247120" cy="27940"/>
+          </a:xfrm>
+          <a:prstGeom prst="rect">
+            <a:avLst/>
+          </a:prstGeom>
+          <a:solidFill>
+            <a:srgbClr val="CC0000"/>
+          </a:solidFill>
+          <a:ln>
+            <a:noFill/>
+          </a:ln>
+        </p:spPr>
+        <p:style>
+          <a:lnRef idx="1">
+            <a:schemeClr val="accent1"/>
+          </a:lnRef>
+          <a:fillRef idx="3">
+            <a:schemeClr val="accent1"/>
+          </a:fillRef>
+          <a:effectRef idx="2">
+            <a:schemeClr val="accent1"/>
+          </a:effectRef>
+          <a:fontRef idx="minor">
+            <a:schemeClr val="lt1"/>
+          </a:fontRef>
+        </p:style>
+        <p:txBody>
+          <a:bodyPr rtlCol="0" anchor="ctr"/>
+          <a:lstStyle/>
+          <a:p>
+            <a:pPr algn="ctr"/>
+          </a:p>
+        </p:txBody>
+      </p:sp>
+      <p:sp>
+        <p:nvSpPr>
+          <p:cNvPr id="5" name="TextBox 4"/>
+          <p:cNvSpPr txBox="1"/>
+          <p:nvPr/>
+        </p:nvSpPr>
+        <p:spPr>
+          <a:xfrm>
+            <a:off x="640080" y="1600200"/>
+            <a:ext cx="10972800" cy="4937760"/>
+          </a:xfrm>
+          <a:prstGeom prst="rect">
+            <a:avLst/>
+          </a:prstGeom>
+          <a:noFill/>
+        </p:spPr>
+        <p:txBody>
+          <a:bodyPr wrap="square">
+            <a:spAutoFit/>
+          </a:bodyPr>
+          <a:lstStyle/>
+          <a:p>
+            <a:pPr>
+              <a:spcAft>
+                <a:spcPts val="800"/>
+              </a:spcAft>
+            </a:pPr>
+            <a:r>
+              <a:rPr sz="1700" b="0" i="0">
+                <a:solidFill>
+                  <a:srgbClr val="1A1A1A"/>
+                </a:solidFill>
+                <a:latin typeface="Arial"/>
+              </a:rPr>
+              <a:t>•  Pham (2009), Ch. 3-4; Cartea-Jaikumar-Penalva, Ch. 6</a:t>
             </a:r>
           </a:p>
         </p:txBody>
